--- a/slides/image/图像修改.pptx
+++ b/slides/image/图像修改.pptx
@@ -272,7 +272,7 @@
           <a:p>
             <a:fld id="{760FBDFE-C587-4B4C-A407-44438C67B59E}" type="datetimeFigureOut">
               <a:rPr lang="zh-CN" altLang="en-US" smtClean="0"/>
-              <a:t>2026/06/08</a:t>
+              <a:t>2026/06/14</a:t>
             </a:fld>
             <a:endParaRPr lang="zh-CN" altLang="en-US"/>
           </a:p>
@@ -371,7 +371,7 @@
           <a:p>
             <a:fld id="{760FBDFE-C587-4B4C-A407-44438C67B59E}" type="datetimeFigureOut">
               <a:rPr lang="zh-CN" altLang="en-US" smtClean="0"/>
-              <a:t>2026/06/08</a:t>
+              <a:t>2026/06/14</a:t>
             </a:fld>
             <a:endParaRPr lang="zh-CN" altLang="en-US"/>
           </a:p>
@@ -529,7 +529,7 @@
           <a:p>
             <a:fld id="{760FBDFE-C587-4B4C-A407-44438C67B59E}" type="datetimeFigureOut">
               <a:rPr lang="zh-CN" altLang="en-US" smtClean="0"/>
-              <a:t>2026/06/08</a:t>
+              <a:t>2026/06/14</a:t>
             </a:fld>
             <a:endParaRPr lang="zh-CN" altLang="en-US"/>
           </a:p>
@@ -800,7 +800,7 @@
           <a:p>
             <a:fld id="{760FBDFE-C587-4B4C-A407-44438C67B59E}" type="datetimeFigureOut">
               <a:rPr lang="zh-CN" altLang="en-US" smtClean="0"/>
-              <a:t>2026/06/08</a:t>
+              <a:t>2026/06/14</a:t>
             </a:fld>
             <a:endParaRPr lang="zh-CN" altLang="en-US"/>
           </a:p>
@@ -1060,7 +1060,7 @@
           <a:p>
             <a:fld id="{760FBDFE-C587-4B4C-A407-44438C67B59E}" type="datetimeFigureOut">
               <a:rPr lang="zh-CN" altLang="en-US" smtClean="0"/>
-              <a:t>2026/06/08</a:t>
+              <a:t>2026/06/14</a:t>
             </a:fld>
             <a:endParaRPr lang="zh-CN" altLang="en-US"/>
           </a:p>
@@ -1314,7 +1314,7 @@
           <a:p>
             <a:fld id="{760FBDFE-C587-4B4C-A407-44438C67B59E}" type="datetimeFigureOut">
               <a:rPr lang="zh-CN" altLang="en-US" smtClean="0"/>
-              <a:t>2026/06/08</a:t>
+              <a:t>2026/06/14</a:t>
             </a:fld>
             <a:endParaRPr lang="zh-CN" altLang="en-US"/>
           </a:p>
@@ -1728,7 +1728,7 @@
           <a:p>
             <a:fld id="{760FBDFE-C587-4B4C-A407-44438C67B59E}" type="datetimeFigureOut">
               <a:rPr lang="zh-CN" altLang="en-US" smtClean="0"/>
-              <a:t>2026/06/08</a:t>
+              <a:t>2026/06/14</a:t>
             </a:fld>
             <a:endParaRPr lang="zh-CN" altLang="en-US"/>
           </a:p>
@@ -1860,7 +1860,7 @@
           <a:p>
             <a:fld id="{760FBDFE-C587-4B4C-A407-44438C67B59E}" type="datetimeFigureOut">
               <a:rPr lang="zh-CN" altLang="en-US" smtClean="0"/>
-              <a:t>2026/06/08</a:t>
+              <a:t>2026/06/14</a:t>
             </a:fld>
             <a:endParaRPr lang="zh-CN" altLang="en-US"/>
           </a:p>
@@ -1959,7 +1959,7 @@
           <a:p>
             <a:fld id="{760FBDFE-C587-4B4C-A407-44438C67B59E}" type="datetimeFigureOut">
               <a:rPr lang="zh-CN" altLang="en-US" smtClean="0"/>
-              <a:t>2026/06/08</a:t>
+              <a:t>2026/06/14</a:t>
             </a:fld>
             <a:endParaRPr lang="zh-CN" altLang="en-US"/>
           </a:p>
@@ -2131,7 +2131,7 @@
           <a:p>
             <a:fld id="{9EFD9D74-47D9-4702-A33C-335B63B48DBF}" type="datetimeFigureOut">
               <a:rPr lang="zh-CN" altLang="en-US" smtClean="0"/>
-              <a:t>2026/06/08</a:t>
+              <a:t>2026/06/14</a:t>
             </a:fld>
             <a:endParaRPr lang="zh-CN" altLang="en-US" dirty="0"/>
           </a:p>
@@ -2371,7 +2371,7 @@
           <a:p>
             <a:fld id="{760FBDFE-C587-4B4C-A407-44438C67B59E}" type="datetimeFigureOut">
               <a:rPr lang="zh-CN" altLang="en-US" smtClean="0"/>
-              <a:t>2026/06/08</a:t>
+              <a:t>2026/06/14</a:t>
             </a:fld>
             <a:endParaRPr lang="zh-CN" altLang="en-US"/>
           </a:p>
@@ -2594,7 +2594,7 @@
           <a:p>
             <a:fld id="{760FBDFE-C587-4B4C-A407-44438C67B59E}" type="datetimeFigureOut">
               <a:rPr lang="zh-CN" altLang="en-US" smtClean="0"/>
-              <a:t>2026/06/08</a:t>
+              <a:t>2026/06/14</a:t>
             </a:fld>
             <a:endParaRPr lang="zh-CN" altLang="en-US"/>
           </a:p>
@@ -3076,1003 +3076,258 @@
           </a:prstGeom>
         </p:spPr>
       </p:pic>
-      <mc:AlternateContent xmlns:mc="http://schemas.openxmlformats.org/markup-compatibility/2006" xmlns:a14="http://schemas.microsoft.com/office/drawing/2010/main">
-        <mc:Choice Requires="a14">
-          <p:sp>
-            <p:nvSpPr>
-              <p:cNvPr id="7" name="文本框 6"/>
-              <p:cNvSpPr txBox="1"/>
-              <p:nvPr/>
-            </p:nvSpPr>
-            <p:spPr>
-              <a:xfrm>
-                <a:off x="5573715" y="3513372"/>
-                <a:ext cx="2261235" cy="342900"/>
-              </a:xfrm>
-              <a:prstGeom prst="rect">
-                <a:avLst/>
-              </a:prstGeom>
-              <a:noFill/>
-            </p:spPr>
-            <p:txBody>
-              <a:bodyPr wrap="none" rtlCol="0" anchor="t">
-                <a:spAutoFit/>
-              </a:bodyPr>
-              <a:lstStyle/>
-              <a:p>
-                <a:pPr algn="l"/>
-                <a14:m>
-                  <m:oMathPara xmlns:m="http://schemas.openxmlformats.org/officeDocument/2006/math">
-                    <m:oMathParaPr>
-                      <m:jc m:val="centerGroup"/>
-                    </m:oMathParaPr>
-                    <m:oMath xmlns:m="http://schemas.openxmlformats.org/officeDocument/2006/math">
-                      <m:r>
-                        <a:rPr lang="en-US" altLang="zh-CN" sz="1515" i="1">
-                          <a:latin typeface="Cambria Math" panose="02040503050406030204" charset="0"/>
-                          <a:ea typeface="Microsoft JhengHei" panose="020B0604030504040204" charset="-120"/>
-                          <a:cs typeface="Cambria Math" panose="02040503050406030204" charset="0"/>
-                        </a:rPr>
-                        <m:t>𝑦</m:t>
-                      </m:r>
-                      <m:r>
-                        <a:rPr lang="en-US" altLang="zh-CN" sz="1515" i="1">
-                          <a:latin typeface="Cambria Math" panose="02040503050406030204" charset="0"/>
-                          <a:ea typeface="MS Mincho" charset="0"/>
-                          <a:cs typeface="Cambria Math" panose="02040503050406030204" charset="0"/>
-                        </a:rPr>
-                        <m:t>=</m:t>
-                      </m:r>
-                      <m:sSub>
-                        <m:sSubPr>
-                          <m:ctrlPr>
-                            <a:rPr lang="en-US" altLang="zh-CN" sz="1515" i="1">
-                              <a:latin typeface="Cambria Math" panose="02040503050406030204" pitchFamily="18" charset="0"/>
-                              <a:ea typeface="Microsoft JhengHei" panose="020B0604030504040204" charset="-120"/>
-                              <a:cs typeface="Cambria Math" panose="02040503050406030204" charset="0"/>
-                            </a:rPr>
-                          </m:ctrlPr>
-                        </m:sSubPr>
-                        <m:e>
-                          <m:r>
-                            <a:rPr lang="en-US" altLang="zh-CN" sz="1515" i="1">
-                              <a:latin typeface="Cambria Math" panose="02040503050406030204" charset="0"/>
-                              <a:ea typeface="Microsoft JhengHei" panose="020B0604030504040204" charset="-120"/>
-                              <a:cs typeface="Cambria Math" panose="02040503050406030204" charset="0"/>
-                            </a:rPr>
-                            <m:t>𝑧</m:t>
-                          </m:r>
-                        </m:e>
-                        <m:sub>
-                          <m:r>
-                            <a:rPr lang="en-US" altLang="zh-CN" sz="1515" i="1">
-                              <a:latin typeface="Cambria Math" panose="02040503050406030204" charset="0"/>
-                              <a:ea typeface="Microsoft JhengHei" panose="020B0604030504040204" charset="-120"/>
-                              <a:cs typeface="Cambria Math" panose="02040503050406030204" charset="0"/>
-                            </a:rPr>
-                            <m:t>𝑝</m:t>
-                          </m:r>
-                        </m:sub>
-                      </m:sSub>
-                      <m:r>
-                        <a:rPr lang="en-US" altLang="zh-CN" sz="1515" i="1">
-                          <a:latin typeface="Cambria Math" panose="02040503050406030204" charset="0"/>
-                          <a:ea typeface="Microsoft JhengHei" panose="020B0604030504040204" charset="-120"/>
-                          <a:cs typeface="Cambria Math" panose="02040503050406030204" charset="0"/>
-                        </a:rPr>
-                        <m:t>𝑙</m:t>
-                      </m:r>
-                      <m:r>
-                        <a:rPr lang="en-US" altLang="zh-CN" sz="1515" i="1">
-                          <a:latin typeface="Cambria Math" panose="02040503050406030204" charset="0"/>
-                          <a:ea typeface="MS Mincho" charset="0"/>
-                          <a:cs typeface="Cambria Math" panose="02040503050406030204" charset="0"/>
-                        </a:rPr>
-                        <m:t> → </m:t>
-                      </m:r>
-                      <m:sSub>
-                        <m:sSubPr>
-                          <m:ctrlPr>
-                            <a:rPr lang="en-US" altLang="zh-CN" sz="1515" i="1">
-                              <a:latin typeface="Cambria Math" panose="02040503050406030204" pitchFamily="18" charset="0"/>
-                              <a:ea typeface="Microsoft JhengHei" panose="020B0604030504040204" charset="-120"/>
-                              <a:cs typeface="Cambria Math" panose="02040503050406030204" charset="0"/>
-                            </a:rPr>
-                          </m:ctrlPr>
-                        </m:sSubPr>
-                        <m:e>
-                          <m:r>
-                            <a:rPr lang="en-US" altLang="zh-CN" sz="1515" i="1">
-                              <a:latin typeface="Cambria Math" panose="02040503050406030204" charset="0"/>
-                              <a:ea typeface="MS Mincho" charset="0"/>
-                              <a:cs typeface="Cambria Math" panose="02040503050406030204" charset="0"/>
-                            </a:rPr>
-                            <m:t>𝛾</m:t>
-                          </m:r>
-                        </m:e>
-                        <m:sub>
-                          <m:sSub>
-                            <m:sSubPr>
-                              <m:ctrlPr>
-                                <a:rPr lang="en-US" altLang="zh-CN" sz="1515" i="1">
-                                  <a:latin typeface="Cambria Math" panose="02040503050406030204" pitchFamily="18" charset="0"/>
-                                  <a:ea typeface="Microsoft JhengHei" panose="020B0604030504040204" charset="-120"/>
-                                  <a:cs typeface="Cambria Math" panose="02040503050406030204" charset="0"/>
-                                </a:rPr>
-                              </m:ctrlPr>
-                            </m:sSubPr>
-                            <m:e>
-                              <m:r>
-                                <a:rPr lang="en-US" altLang="zh-CN" sz="1515" i="1">
-                                  <a:latin typeface="Cambria Math" panose="02040503050406030204" charset="0"/>
-                                  <a:ea typeface="Microsoft JhengHei" panose="020B0604030504040204" charset="-120"/>
-                                  <a:cs typeface="Cambria Math" panose="02040503050406030204" charset="0"/>
-                                </a:rPr>
-                                <m:t>𝑧</m:t>
-                              </m:r>
-                            </m:e>
-                            <m:sub>
-                              <m:r>
-                                <a:rPr lang="en-US" altLang="zh-CN" sz="1515" i="1">
-                                  <a:latin typeface="Cambria Math" panose="02040503050406030204" charset="0"/>
-                                  <a:ea typeface="Microsoft JhengHei" panose="020B0604030504040204" charset="-120"/>
-                                  <a:cs typeface="Cambria Math" panose="02040503050406030204" charset="0"/>
-                                </a:rPr>
-                                <m:t>𝑝</m:t>
-                              </m:r>
-                            </m:sub>
-                          </m:sSub>
-                        </m:sub>
-                      </m:sSub>
-                      <m:r>
-                        <a:rPr lang="en-US" altLang="zh-CN" sz="1515" i="1">
-                          <a:latin typeface="Cambria Math" panose="02040503050406030204" charset="0"/>
-                          <a:ea typeface="MS Mincho" charset="0"/>
-                          <a:cs typeface="Cambria Math" panose="02040503050406030204" charset="0"/>
-                        </a:rPr>
-                        <m:t>=1.24% </m:t>
-                      </m:r>
-                    </m:oMath>
-                  </m:oMathPara>
-                </a14:m>
-                <a:endParaRPr lang="zh-CN" altLang="en-US" sz="1515">
-                  <a:latin typeface="Microsoft JhengHei" panose="020B0604030504040204" charset="-120"/>
-                  <a:ea typeface="Microsoft JhengHei" panose="020B0604030504040204" charset="-120"/>
-                  <a:cs typeface="Microsoft JhengHei" panose="020B0604030504040204" charset="-120"/>
-                </a:endParaRPr>
-              </a:p>
-            </p:txBody>
-          </p:sp>
-        </mc:Choice>
-        <mc:Fallback xmlns="">
-          <p:sp>
-            <p:nvSpPr>
-              <p:cNvPr id="7" name="文本框 6"/>
-              <p:cNvSpPr txBox="1">
-                <a:spLocks noRot="1" noChangeAspect="1" noMove="1" noResize="1" noEditPoints="1" noAdjustHandles="1" noChangeArrowheads="1" noChangeShapeType="1" noTextEdit="1"/>
-              </p:cNvSpPr>
-              <p:nvPr/>
-            </p:nvSpPr>
-            <p:spPr>
-              <a:xfrm>
-                <a:off x="5573715" y="3513372"/>
-                <a:ext cx="2261235" cy="342900"/>
-              </a:xfrm>
-              <a:prstGeom prst="rect">
-                <a:avLst/>
-              </a:prstGeom>
-              <a:blipFill rotWithShape="1">
-                <a:blip r:embed="rId4"/>
-                <a:stretch>
-                  <a:fillRect l="-14" t="-161" r="14" b="161"/>
-                </a:stretch>
-              </a:blipFill>
-            </p:spPr>
-            <p:txBody>
-              <a:bodyPr/>
-              <a:lstStyle/>
-              <a:p>
-                <a:r>
-                  <a:rPr lang="zh-CN" altLang="en-US">
-                    <a:noFill/>
-                  </a:rPr>
-                  <a:t> </a:t>
-                </a:r>
-              </a:p>
-            </p:txBody>
-          </p:sp>
-        </mc:Fallback>
-      </mc:AlternateContent>
-      <mc:AlternateContent xmlns:mc="http://schemas.openxmlformats.org/markup-compatibility/2006" xmlns:a14="http://schemas.microsoft.com/office/drawing/2010/main">
-        <mc:Choice Requires="a14">
-          <p:sp>
-            <p:nvSpPr>
-              <p:cNvPr id="8" name="文本框 7"/>
-              <p:cNvSpPr txBox="1"/>
-              <p:nvPr/>
-            </p:nvSpPr>
-            <p:spPr>
-              <a:xfrm>
-                <a:off x="2064193" y="4720320"/>
-                <a:ext cx="2700020" cy="344170"/>
-              </a:xfrm>
-              <a:prstGeom prst="rect">
-                <a:avLst/>
-              </a:prstGeom>
-              <a:noFill/>
-            </p:spPr>
-            <p:txBody>
-              <a:bodyPr wrap="none" rtlCol="0" anchor="t">
-                <a:spAutoFit/>
-              </a:bodyPr>
-              <a:lstStyle/>
-              <a:p>
-                <a:pPr algn="l"/>
-                <a14:m>
-                  <m:oMathPara xmlns:m="http://schemas.openxmlformats.org/officeDocument/2006/math">
-                    <m:oMathParaPr>
-                      <m:jc m:val="centerGroup"/>
-                    </m:oMathParaPr>
-                    <m:oMath xmlns:m="http://schemas.openxmlformats.org/officeDocument/2006/math">
-                      <m:r>
-                        <a:rPr lang="en-US" altLang="zh-CN" sz="1515" i="1">
-                          <a:latin typeface="Cambria Math" panose="02040503050406030204" charset="0"/>
-                          <a:cs typeface="Cambria Math" panose="02040503050406030204" charset="0"/>
-                        </a:rPr>
-                        <m:t>𝑦</m:t>
-                      </m:r>
-                      <m:r>
-                        <a:rPr lang="en-US" altLang="zh-CN" sz="1515" i="1">
-                          <a:latin typeface="Cambria Math" panose="02040503050406030204" charset="0"/>
-                          <a:ea typeface="MS Mincho" charset="0"/>
-                          <a:cs typeface="Cambria Math" panose="02040503050406030204" charset="0"/>
-                        </a:rPr>
-                        <m:t>=</m:t>
-                      </m:r>
-                      <m:sSub>
-                        <m:sSubPr>
-                          <m:ctrlPr>
-                            <a:rPr lang="en-US" altLang="zh-CN" sz="1515" i="1">
-                              <a:latin typeface="Cambria Math" panose="02040503050406030204" pitchFamily="18" charset="0"/>
-                              <a:cs typeface="Cambria Math" panose="02040503050406030204" charset="0"/>
-                            </a:rPr>
-                          </m:ctrlPr>
-                        </m:sSubPr>
-                        <m:e>
-                          <m:r>
-                            <a:rPr lang="en-US" altLang="zh-CN" sz="1515" i="1">
-                              <a:latin typeface="Cambria Math" panose="02040503050406030204" charset="0"/>
-                              <a:cs typeface="Cambria Math" panose="02040503050406030204" charset="0"/>
-                            </a:rPr>
-                            <m:t>𝑧</m:t>
-                          </m:r>
-                        </m:e>
-                        <m:sub>
-                          <m:r>
-                            <a:rPr lang="en-US" altLang="zh-CN" sz="1515" i="1">
-                              <a:latin typeface="Cambria Math" panose="02040503050406030204" charset="0"/>
-                              <a:ea typeface="MS Mincho" charset="0"/>
-                              <a:cs typeface="Cambria Math" panose="02040503050406030204" charset="0"/>
-                            </a:rPr>
-                            <m:t>1</m:t>
-                          </m:r>
-                        </m:sub>
-                      </m:sSub>
-                      <m:sSup>
-                        <m:sSupPr>
-                          <m:ctrlPr>
-                            <a:rPr lang="en-US" altLang="zh-CN" sz="1515" i="1">
-                              <a:latin typeface="Cambria Math" panose="02040503050406030204" pitchFamily="18" charset="0"/>
-                              <a:cs typeface="Cambria Math" panose="02040503050406030204" charset="0"/>
-                            </a:rPr>
-                          </m:ctrlPr>
-                        </m:sSupPr>
-                        <m:e>
-                          <m:r>
-                            <a:rPr lang="en-US" altLang="zh-CN" sz="1515" i="1">
-                              <a:latin typeface="Cambria Math" panose="02040503050406030204" charset="0"/>
-                              <a:cs typeface="Cambria Math" panose="02040503050406030204" charset="0"/>
-                            </a:rPr>
-                            <m:t>𝑘</m:t>
-                          </m:r>
-                        </m:e>
-                        <m:sup>
-                          <m:r>
-                            <a:rPr lang="en-US" altLang="zh-CN" sz="1515" i="1">
-                              <a:latin typeface="Cambria Math" panose="02040503050406030204" charset="0"/>
-                              <a:ea typeface="MS Mincho" charset="0"/>
-                              <a:cs typeface="Cambria Math" panose="02040503050406030204" charset="0"/>
-                            </a:rPr>
-                            <m:t>𝛼</m:t>
-                          </m:r>
-                        </m:sup>
-                      </m:sSup>
-                      <m:sSup>
-                        <m:sSupPr>
-                          <m:ctrlPr>
-                            <a:rPr lang="en-US" altLang="zh-CN" sz="1515" i="1">
-                              <a:latin typeface="Cambria Math" panose="02040503050406030204" pitchFamily="18" charset="0"/>
-                              <a:cs typeface="Cambria Math" panose="02040503050406030204" charset="0"/>
-                            </a:rPr>
-                          </m:ctrlPr>
-                        </m:sSupPr>
-                        <m:e>
-                          <m:r>
-                            <a:rPr lang="en-US" altLang="zh-CN" sz="1515" i="1">
-                              <a:latin typeface="Cambria Math" panose="02040503050406030204" charset="0"/>
-                              <a:cs typeface="Cambria Math" panose="02040503050406030204" charset="0"/>
-                            </a:rPr>
-                            <m:t>𝑙</m:t>
-                          </m:r>
-                        </m:e>
-                        <m:sup>
-                          <m:r>
-                            <a:rPr lang="en-US" altLang="zh-CN" sz="1515" i="1">
-                              <a:latin typeface="Cambria Math" panose="02040503050406030204" charset="0"/>
-                              <a:ea typeface="MS Mincho" charset="0"/>
-                              <a:cs typeface="Cambria Math" panose="02040503050406030204" charset="0"/>
-                            </a:rPr>
-                            <m:t>1</m:t>
-                          </m:r>
-                          <m:r>
-                            <a:rPr lang="en-US" altLang="zh-CN" sz="1515" i="1">
-                              <a:latin typeface="Cambria Math" panose="02040503050406030204" charset="0"/>
-                              <a:cs typeface="Cambria Math" panose="02040503050406030204" charset="0"/>
-                            </a:rPr>
-                            <m:t>−</m:t>
-                          </m:r>
-                          <m:r>
-                            <a:rPr lang="en-US" altLang="zh-CN" sz="1515" i="1">
-                              <a:latin typeface="Cambria Math" panose="02040503050406030204" charset="0"/>
-                              <a:ea typeface="MS Mincho" charset="0"/>
-                              <a:cs typeface="Cambria Math" panose="02040503050406030204" charset="0"/>
-                            </a:rPr>
-                            <m:t>𝛼</m:t>
-                          </m:r>
-                        </m:sup>
-                      </m:sSup>
-                      <m:r>
-                        <a:rPr lang="en-US" altLang="zh-CN" sz="1515" i="1">
-                          <a:latin typeface="Cambria Math" panose="02040503050406030204" charset="0"/>
-                          <a:ea typeface="MS Mincho" charset="0"/>
-                          <a:cs typeface="Cambria Math" panose="02040503050406030204" charset="0"/>
-                        </a:rPr>
-                        <m:t> →</m:t>
-                      </m:r>
-                      <m:sSub>
-                        <m:sSubPr>
-                          <m:ctrlPr>
-                            <a:rPr lang="en-US" altLang="zh-CN" sz="1515" i="1">
-                              <a:latin typeface="Cambria Math" panose="02040503050406030204" pitchFamily="18" charset="0"/>
-                              <a:cs typeface="Cambria Math" panose="02040503050406030204" charset="0"/>
-                            </a:rPr>
-                          </m:ctrlPr>
-                        </m:sSubPr>
-                        <m:e>
-                          <m:r>
-                            <a:rPr lang="en-US" altLang="zh-CN" sz="1515" i="1">
-                              <a:latin typeface="Cambria Math" panose="02040503050406030204" charset="0"/>
-                              <a:cs typeface="Cambria Math" panose="02040503050406030204" charset="0"/>
-                            </a:rPr>
-                            <m:t>𝛾</m:t>
-                          </m:r>
-                        </m:e>
-                        <m:sub>
-                          <m:sSub>
-                            <m:sSubPr>
-                              <m:ctrlPr>
-                                <a:rPr lang="en-US" altLang="zh-CN" sz="1515" i="1">
-                                  <a:latin typeface="Cambria Math" panose="02040503050406030204" pitchFamily="18" charset="0"/>
-                                  <a:cs typeface="Cambria Math" panose="02040503050406030204" charset="0"/>
-                                </a:rPr>
-                              </m:ctrlPr>
-                            </m:sSubPr>
-                            <m:e>
-                              <m:r>
-                                <a:rPr lang="en-US" altLang="zh-CN" sz="1515" i="1">
-                                  <a:latin typeface="Cambria Math" panose="02040503050406030204" charset="0"/>
-                                  <a:cs typeface="Cambria Math" panose="02040503050406030204" charset="0"/>
-                                </a:rPr>
-                                <m:t>𝑧</m:t>
-                              </m:r>
-                            </m:e>
-                            <m:sub>
-                              <m:r>
-                                <a:rPr lang="en-US" altLang="zh-CN" sz="1515" i="1">
-                                  <a:latin typeface="Cambria Math" panose="02040503050406030204" charset="0"/>
-                                  <a:ea typeface="MS Mincho" charset="0"/>
-                                  <a:cs typeface="Cambria Math" panose="02040503050406030204" charset="0"/>
-                                </a:rPr>
-                                <m:t>1</m:t>
-                              </m:r>
-                            </m:sub>
-                          </m:sSub>
-                        </m:sub>
-                      </m:sSub>
-                      <m:r>
-                        <a:rPr lang="en-US" altLang="zh-CN" sz="1515" i="1">
-                          <a:latin typeface="Cambria Math" panose="02040503050406030204" charset="0"/>
-                          <a:ea typeface="MS Mincho" charset="0"/>
-                          <a:cs typeface="Cambria Math" panose="02040503050406030204" charset="0"/>
-                        </a:rPr>
-                        <m:t>=0.71% </m:t>
-                      </m:r>
-                    </m:oMath>
-                  </m:oMathPara>
-                </a14:m>
-                <a:endParaRPr lang="zh-CN" altLang="en-US" sz="1515">
-                  <a:latin typeface="Times New Roman" panose="02020603050405020304" charset="0"/>
-                  <a:cs typeface="Times New Roman" panose="02020603050405020304" charset="0"/>
-                </a:endParaRPr>
-              </a:p>
-            </p:txBody>
-          </p:sp>
-        </mc:Choice>
-        <mc:Fallback xmlns="">
-          <p:sp>
-            <p:nvSpPr>
-              <p:cNvPr id="8" name="文本框 7"/>
-              <p:cNvSpPr txBox="1">
-                <a:spLocks noRot="1" noChangeAspect="1" noMove="1" noResize="1" noEditPoints="1" noAdjustHandles="1" noChangeArrowheads="1" noChangeShapeType="1" noTextEdit="1"/>
-              </p:cNvSpPr>
-              <p:nvPr/>
-            </p:nvSpPr>
-            <p:spPr>
-              <a:xfrm>
-                <a:off x="2064193" y="4720320"/>
-                <a:ext cx="2700020" cy="344170"/>
-              </a:xfrm>
-              <a:prstGeom prst="rect">
-                <a:avLst/>
-              </a:prstGeom>
-              <a:blipFill rotWithShape="1">
-                <a:blip r:embed="rId5"/>
-                <a:stretch>
-                  <a:fillRect l="-16" t="-106" r="16" b="106"/>
-                </a:stretch>
-              </a:blipFill>
-            </p:spPr>
-            <p:txBody>
-              <a:bodyPr/>
-              <a:lstStyle/>
-              <a:p>
-                <a:r>
-                  <a:rPr lang="zh-CN" altLang="en-US">
-                    <a:noFill/>
-                  </a:rPr>
-                  <a:t> </a:t>
-                </a:r>
-              </a:p>
-            </p:txBody>
-          </p:sp>
-        </mc:Fallback>
-      </mc:AlternateContent>
-      <mc:AlternateContent xmlns:mc="http://schemas.openxmlformats.org/markup-compatibility/2006" xmlns:a14="http://schemas.microsoft.com/office/drawing/2010/main">
-        <mc:Choice Requires="a14">
-          <p:sp>
-            <p:nvSpPr>
-              <p:cNvPr id="9" name="文本框 8"/>
-              <p:cNvSpPr txBox="1"/>
-              <p:nvPr/>
-            </p:nvSpPr>
-            <p:spPr>
-              <a:xfrm>
-                <a:off x="3959443" y="1983946"/>
-                <a:ext cx="3330575" cy="356870"/>
-              </a:xfrm>
-              <a:prstGeom prst="rect">
-                <a:avLst/>
-              </a:prstGeom>
-              <a:noFill/>
-            </p:spPr>
-            <p:txBody>
-              <a:bodyPr wrap="none" rtlCol="0" anchor="t">
-                <a:spAutoFit/>
-              </a:bodyPr>
-              <a:lstStyle/>
-              <a:p>
-                <a:pPr algn="l"/>
-                <a14:m>
-                  <m:oMathPara xmlns:m="http://schemas.openxmlformats.org/officeDocument/2006/math">
-                    <m:oMathParaPr>
-                      <m:jc m:val="centerGroup"/>
-                    </m:oMathParaPr>
-                    <m:oMath xmlns:m="http://schemas.openxmlformats.org/officeDocument/2006/math">
-                      <m:r>
-                        <a:rPr lang="en-US" altLang="zh-CN" sz="1515" i="1">
-                          <a:latin typeface="Cambria Math" panose="02040503050406030204" charset="0"/>
-                          <a:cs typeface="Cambria Math" panose="02040503050406030204" charset="0"/>
-                        </a:rPr>
-                        <m:t>𝑦</m:t>
-                      </m:r>
-                      <m:r>
-                        <a:rPr lang="en-US" altLang="zh-CN" sz="1515" i="1">
-                          <a:latin typeface="Cambria Math" panose="02040503050406030204" charset="0"/>
-                          <a:ea typeface="MS Mincho" charset="0"/>
-                          <a:cs typeface="Cambria Math" panose="02040503050406030204" charset="0"/>
-                        </a:rPr>
-                        <m:t>=</m:t>
-                      </m:r>
-                      <m:sSub>
-                        <m:sSubPr>
-                          <m:ctrlPr>
-                            <a:rPr lang="en-US" altLang="zh-CN" sz="1515" i="1">
-                              <a:latin typeface="Cambria Math" panose="02040503050406030204" pitchFamily="18" charset="0"/>
-                              <a:cs typeface="Cambria Math" panose="02040503050406030204" charset="0"/>
-                            </a:rPr>
-                          </m:ctrlPr>
-                        </m:sSubPr>
-                        <m:e>
-                          <m:r>
-                            <a:rPr lang="en-US" altLang="zh-CN" sz="1515" i="1">
-                              <a:latin typeface="Cambria Math" panose="02040503050406030204" charset="0"/>
-                              <a:cs typeface="Cambria Math" panose="02040503050406030204" charset="0"/>
-                            </a:rPr>
-                            <m:t>𝑧</m:t>
-                          </m:r>
-                        </m:e>
-                        <m:sub>
-                          <m:r>
-                            <a:rPr lang="en-US" altLang="zh-CN" sz="1515" i="1">
-                              <a:latin typeface="Cambria Math" panose="02040503050406030204" charset="0"/>
-                              <a:cs typeface="Cambria Math" panose="02040503050406030204" charset="0"/>
-                            </a:rPr>
-                            <m:t>2</m:t>
-                          </m:r>
-                        </m:sub>
-                      </m:sSub>
-                      <m:sSubSup>
-                        <m:sSubSupPr>
-                          <m:ctrlPr>
-                            <a:rPr lang="en-US" altLang="zh-CN" sz="1515" i="1">
-                              <a:latin typeface="Cambria Math" panose="02040503050406030204" pitchFamily="18" charset="0"/>
-                              <a:ea typeface="MS Mincho" charset="0"/>
-                              <a:cs typeface="Cambria Math" panose="02040503050406030204" charset="0"/>
-                            </a:rPr>
-                          </m:ctrlPr>
-                        </m:sSubSupPr>
-                        <m:e>
-                          <m:r>
-                            <a:rPr lang="en-US" altLang="zh-CN" sz="1515" i="1">
-                              <a:latin typeface="Cambria Math" panose="02040503050406030204" charset="0"/>
-                              <a:ea typeface="MS Mincho" charset="0"/>
-                              <a:cs typeface="Cambria Math" panose="02040503050406030204" charset="0"/>
-                            </a:rPr>
-                            <m:t>𝑘</m:t>
-                          </m:r>
-                        </m:e>
-                        <m:sub>
-                          <m:r>
-                            <a:rPr lang="en-US" altLang="zh-CN" sz="1515" i="1">
-                              <a:latin typeface="Cambria Math" panose="02040503050406030204" charset="0"/>
-                              <a:ea typeface="MS Mincho" charset="0"/>
-                              <a:cs typeface="Cambria Math" panose="02040503050406030204" charset="0"/>
-                            </a:rPr>
-                            <m:t>𝑒</m:t>
-                          </m:r>
-                        </m:sub>
-                        <m:sup>
-                          <m:sSub>
-                            <m:sSubPr>
-                              <m:ctrlPr>
-                                <a:rPr lang="en-US" altLang="zh-CN" sz="1515" i="1">
-                                  <a:latin typeface="Cambria Math" panose="02040503050406030204" pitchFamily="18" charset="0"/>
-                                  <a:ea typeface="MS Mincho" charset="0"/>
-                                  <a:cs typeface="Cambria Math" panose="02040503050406030204" charset="0"/>
-                                </a:rPr>
-                              </m:ctrlPr>
-                            </m:sSubPr>
-                            <m:e>
-                              <m:r>
-                                <a:rPr lang="en-US" altLang="zh-CN" sz="1515" i="1">
-                                  <a:latin typeface="Cambria Math" panose="02040503050406030204" charset="0"/>
-                                  <a:ea typeface="MS Mincho" charset="0"/>
-                                  <a:cs typeface="Cambria Math" panose="02040503050406030204" charset="0"/>
-                                </a:rPr>
-                                <m:t>𝛼</m:t>
-                              </m:r>
-                            </m:e>
-                            <m:sub>
-                              <m:r>
-                                <a:rPr lang="en-US" altLang="zh-CN" sz="1515" i="1">
-                                  <a:latin typeface="Cambria Math" panose="02040503050406030204" charset="0"/>
-                                  <a:ea typeface="MS Mincho" charset="0"/>
-                                  <a:cs typeface="Cambria Math" panose="02040503050406030204" charset="0"/>
-                                </a:rPr>
-                                <m:t>𝑒</m:t>
-                              </m:r>
-                            </m:sub>
-                          </m:sSub>
-                        </m:sup>
-                      </m:sSubSup>
-                      <m:sSubSup>
-                        <m:sSubSupPr>
-                          <m:ctrlPr>
-                            <a:rPr lang="en-US" altLang="zh-CN" sz="1515" i="1">
-                              <a:latin typeface="Cambria Math" panose="02040503050406030204" pitchFamily="18" charset="0"/>
-                              <a:ea typeface="MS Mincho" charset="0"/>
-                              <a:cs typeface="Cambria Math" panose="02040503050406030204" charset="0"/>
-                            </a:rPr>
-                          </m:ctrlPr>
-                        </m:sSubSupPr>
-                        <m:e>
-                          <m:r>
-                            <a:rPr lang="en-US" altLang="zh-CN" sz="1515" i="1">
-                              <a:latin typeface="Cambria Math" panose="02040503050406030204" charset="0"/>
-                              <a:ea typeface="MS Mincho" charset="0"/>
-                              <a:cs typeface="Cambria Math" panose="02040503050406030204" charset="0"/>
-                            </a:rPr>
-                            <m:t>𝑘</m:t>
-                          </m:r>
-                        </m:e>
-                        <m:sub>
-                          <m:r>
-                            <a:rPr lang="en-US" altLang="zh-CN" sz="1515" i="1">
-                              <a:latin typeface="Cambria Math" panose="02040503050406030204" charset="0"/>
-                              <a:ea typeface="MS Mincho" charset="0"/>
-                              <a:cs typeface="Cambria Math" panose="02040503050406030204" charset="0"/>
-                            </a:rPr>
-                            <m:t>𝑠</m:t>
-                          </m:r>
-                        </m:sub>
-                        <m:sup>
-                          <m:sSub>
-                            <m:sSubPr>
-                              <m:ctrlPr>
-                                <a:rPr lang="en-US" altLang="zh-CN" sz="1515" i="1">
-                                  <a:latin typeface="Cambria Math" panose="02040503050406030204" pitchFamily="18" charset="0"/>
-                                  <a:ea typeface="MS Mincho" charset="0"/>
-                                  <a:cs typeface="Cambria Math" panose="02040503050406030204" charset="0"/>
-                                </a:rPr>
-                              </m:ctrlPr>
-                            </m:sSubPr>
-                            <m:e>
-                              <m:r>
-                                <a:rPr lang="en-US" altLang="zh-CN" sz="1515" i="1">
-                                  <a:latin typeface="Cambria Math" panose="02040503050406030204" charset="0"/>
-                                  <a:ea typeface="MS Mincho" charset="0"/>
-                                  <a:cs typeface="Cambria Math" panose="02040503050406030204" charset="0"/>
-                                </a:rPr>
-                                <m:t>𝛼</m:t>
-                              </m:r>
-                            </m:e>
-                            <m:sub>
-                              <m:r>
-                                <a:rPr lang="en-US" altLang="zh-CN" sz="1515" i="1">
-                                  <a:latin typeface="Cambria Math" panose="02040503050406030204" charset="0"/>
-                                  <a:ea typeface="MS Mincho" charset="0"/>
-                                  <a:cs typeface="Cambria Math" panose="02040503050406030204" charset="0"/>
-                                </a:rPr>
-                                <m:t>𝑠</m:t>
-                              </m:r>
-                            </m:sub>
-                          </m:sSub>
-                        </m:sup>
-                      </m:sSubSup>
-                      <m:sSup>
-                        <m:sSupPr>
-                          <m:ctrlPr>
-                            <a:rPr lang="en-US" altLang="zh-CN" sz="1515" i="1">
-                              <a:latin typeface="Cambria Math" panose="02040503050406030204" pitchFamily="18" charset="0"/>
-                              <a:cs typeface="Cambria Math" panose="02040503050406030204" charset="0"/>
-                            </a:rPr>
-                          </m:ctrlPr>
-                        </m:sSupPr>
-                        <m:e>
-                          <m:r>
-                            <a:rPr lang="en-US" altLang="zh-CN" sz="1515" i="1">
-                              <a:latin typeface="Cambria Math" panose="02040503050406030204" charset="0"/>
-                              <a:cs typeface="Cambria Math" panose="02040503050406030204" charset="0"/>
-                            </a:rPr>
-                            <m:t>𝑙</m:t>
-                          </m:r>
-                        </m:e>
-                        <m:sup>
-                          <m:r>
-                            <a:rPr lang="en-US" altLang="zh-CN" sz="1515" i="1">
-                              <a:latin typeface="Cambria Math" panose="02040503050406030204" charset="0"/>
-                              <a:ea typeface="MS Mincho" charset="0"/>
-                              <a:cs typeface="Cambria Math" panose="02040503050406030204" charset="0"/>
-                            </a:rPr>
-                            <m:t>1−</m:t>
-                          </m:r>
-                          <m:sSub>
-                            <m:sSubPr>
-                              <m:ctrlPr>
-                                <a:rPr lang="en-US" altLang="zh-CN" sz="1515" i="1">
-                                  <a:latin typeface="Cambria Math" panose="02040503050406030204" pitchFamily="18" charset="0"/>
-                                  <a:cs typeface="Cambria Math" panose="02040503050406030204" charset="0"/>
-                                </a:rPr>
-                              </m:ctrlPr>
-                            </m:sSubPr>
-                            <m:e>
-                              <m:r>
-                                <a:rPr lang="en-US" altLang="zh-CN" sz="1515" i="1">
-                                  <a:latin typeface="Cambria Math" panose="02040503050406030204" charset="0"/>
-                                  <a:ea typeface="MS Mincho" charset="0"/>
-                                  <a:cs typeface="Cambria Math" panose="02040503050406030204" charset="0"/>
-                                </a:rPr>
-                                <m:t>𝛼</m:t>
-                              </m:r>
-                            </m:e>
-                            <m:sub>
-                              <m:r>
-                                <a:rPr lang="en-US" altLang="zh-CN" sz="1515" i="1">
-                                  <a:latin typeface="Cambria Math" panose="02040503050406030204" charset="0"/>
-                                  <a:cs typeface="Cambria Math" panose="02040503050406030204" charset="0"/>
-                                </a:rPr>
-                                <m:t>𝑒</m:t>
-                              </m:r>
-                            </m:sub>
-                          </m:sSub>
-                          <m:r>
-                            <a:rPr lang="en-US" altLang="zh-CN" sz="1515" i="1">
-                              <a:latin typeface="Cambria Math" panose="02040503050406030204" charset="0"/>
-                              <a:cs typeface="Cambria Math" panose="02040503050406030204" charset="0"/>
-                            </a:rPr>
-                            <m:t>−</m:t>
-                          </m:r>
-                          <m:sSub>
-                            <m:sSubPr>
-                              <m:ctrlPr>
-                                <a:rPr lang="en-US" altLang="zh-CN" sz="1515" i="1">
-                                  <a:latin typeface="Cambria Math" panose="02040503050406030204" pitchFamily="18" charset="0"/>
-                                  <a:cs typeface="Cambria Math" panose="02040503050406030204" charset="0"/>
-                                </a:rPr>
-                              </m:ctrlPr>
-                            </m:sSubPr>
-                            <m:e>
-                              <m:r>
-                                <a:rPr lang="en-US" altLang="zh-CN" sz="1515" i="1">
-                                  <a:latin typeface="Cambria Math" panose="02040503050406030204" charset="0"/>
-                                  <a:ea typeface="MS Mincho" charset="0"/>
-                                  <a:cs typeface="Cambria Math" panose="02040503050406030204" charset="0"/>
-                                </a:rPr>
-                                <m:t>𝛼</m:t>
-                              </m:r>
-                            </m:e>
-                            <m:sub>
-                              <m:r>
-                                <a:rPr lang="en-US" altLang="zh-CN" sz="1515" i="1">
-                                  <a:latin typeface="Cambria Math" panose="02040503050406030204" charset="0"/>
-                                  <a:cs typeface="Cambria Math" panose="02040503050406030204" charset="0"/>
-                                </a:rPr>
-                                <m:t>𝑠</m:t>
-                              </m:r>
-                            </m:sub>
-                          </m:sSub>
-                        </m:sup>
-                      </m:sSup>
-                      <m:r>
-                        <a:rPr lang="en-US" altLang="zh-CN" sz="1515" i="1">
-                          <a:latin typeface="Cambria Math" panose="02040503050406030204" charset="0"/>
-                          <a:ea typeface="MS Mincho" charset="0"/>
-                          <a:cs typeface="Cambria Math" panose="02040503050406030204" charset="0"/>
-                        </a:rPr>
-                        <m:t> →</m:t>
-                      </m:r>
-                      <m:sSub>
-                        <m:sSubPr>
-                          <m:ctrlPr>
-                            <a:rPr lang="en-US" altLang="zh-CN" sz="1515" i="1">
-                              <a:latin typeface="Cambria Math" panose="02040503050406030204" pitchFamily="18" charset="0"/>
-                              <a:cs typeface="Cambria Math" panose="02040503050406030204" charset="0"/>
-                            </a:rPr>
-                          </m:ctrlPr>
-                        </m:sSubPr>
-                        <m:e>
-                          <m:r>
-                            <a:rPr lang="en-US" altLang="zh-CN" sz="1515" i="1">
-                              <a:latin typeface="Cambria Math" panose="02040503050406030204" charset="0"/>
-                              <a:ea typeface="MS Mincho" charset="0"/>
-                              <a:cs typeface="Cambria Math" panose="02040503050406030204" charset="0"/>
-                            </a:rPr>
-                            <m:t>𝛾</m:t>
-                          </m:r>
-                        </m:e>
-                        <m:sub>
-                          <m:sSub>
-                            <m:sSubPr>
-                              <m:ctrlPr>
-                                <a:rPr lang="en-US" altLang="zh-CN" sz="1515" i="1">
-                                  <a:latin typeface="Cambria Math" panose="02040503050406030204" pitchFamily="18" charset="0"/>
-                                  <a:cs typeface="Cambria Math" panose="02040503050406030204" charset="0"/>
-                                </a:rPr>
-                              </m:ctrlPr>
-                            </m:sSubPr>
-                            <m:e>
-                              <m:r>
-                                <a:rPr lang="en-US" altLang="zh-CN" sz="1515" i="1">
-                                  <a:latin typeface="Cambria Math" panose="02040503050406030204" charset="0"/>
-                                  <a:cs typeface="Cambria Math" panose="02040503050406030204" charset="0"/>
-                                </a:rPr>
-                                <m:t>𝑧</m:t>
-                              </m:r>
-                            </m:e>
-                            <m:sub>
-                              <m:r>
-                                <a:rPr lang="en-US" altLang="zh-CN" sz="1515" i="1">
-                                  <a:latin typeface="Cambria Math" panose="02040503050406030204" charset="0"/>
-                                  <a:ea typeface="MS Mincho" charset="0"/>
-                                  <a:cs typeface="Cambria Math" panose="02040503050406030204" charset="0"/>
-                                </a:rPr>
-                                <m:t>2</m:t>
-                              </m:r>
-                            </m:sub>
-                          </m:sSub>
-                        </m:sub>
-                      </m:sSub>
-                      <m:r>
-                        <a:rPr lang="en-US" altLang="zh-CN" sz="1515" i="1">
-                          <a:latin typeface="Cambria Math" panose="02040503050406030204" charset="0"/>
-                          <a:ea typeface="MS Mincho" charset="0"/>
-                          <a:cs typeface="Cambria Math" panose="02040503050406030204" charset="0"/>
-                        </a:rPr>
-                        <m:t>=0.68% </m:t>
-                      </m:r>
-                    </m:oMath>
-                  </m:oMathPara>
-                </a14:m>
-                <a:endParaRPr lang="zh-CN" altLang="en-US" sz="1515">
-                  <a:latin typeface="Times New Roman" panose="02020603050405020304" charset="0"/>
-                  <a:cs typeface="Times New Roman" panose="02020603050405020304" charset="0"/>
-                </a:endParaRPr>
-              </a:p>
-            </p:txBody>
-          </p:sp>
-        </mc:Choice>
-        <mc:Fallback xmlns="">
-          <p:sp>
-            <p:nvSpPr>
-              <p:cNvPr id="9" name="文本框 8"/>
-              <p:cNvSpPr txBox="1">
-                <a:spLocks noRot="1" noChangeAspect="1" noMove="1" noResize="1" noEditPoints="1" noAdjustHandles="1" noChangeArrowheads="1" noChangeShapeType="1" noTextEdit="1"/>
-              </p:cNvSpPr>
-              <p:nvPr/>
-            </p:nvSpPr>
-            <p:spPr>
-              <a:xfrm>
-                <a:off x="3959443" y="1983946"/>
-                <a:ext cx="3330575" cy="356870"/>
-              </a:xfrm>
-              <a:prstGeom prst="rect">
-                <a:avLst/>
-              </a:prstGeom>
-              <a:blipFill rotWithShape="1">
-                <a:blip r:embed="rId6"/>
-                <a:stretch>
-                  <a:fillRect l="-7" t="-58" r="7" b="58"/>
-                </a:stretch>
-              </a:blipFill>
-            </p:spPr>
-            <p:txBody>
-              <a:bodyPr/>
-              <a:lstStyle/>
-              <a:p>
-                <a:r>
-                  <a:rPr lang="zh-CN" altLang="en-US">
-                    <a:noFill/>
-                  </a:rPr>
-                  <a:t> </a:t>
-                </a:r>
-              </a:p>
-            </p:txBody>
-          </p:sp>
-        </mc:Fallback>
-      </mc:AlternateContent>
-      <mc:AlternateContent xmlns:mc="http://schemas.openxmlformats.org/markup-compatibility/2006" xmlns:a14="http://schemas.microsoft.com/office/drawing/2010/main">
-        <mc:Choice Requires="a14">
-          <p:sp>
-            <p:nvSpPr>
-              <p:cNvPr id="10" name="文本框 9"/>
-              <p:cNvSpPr txBox="1"/>
-              <p:nvPr/>
-            </p:nvSpPr>
-            <p:spPr>
-              <a:xfrm>
-                <a:off x="1767290" y="1215314"/>
-                <a:ext cx="1156970" cy="324485"/>
-              </a:xfrm>
-              <a:prstGeom prst="rect">
-                <a:avLst/>
-              </a:prstGeom>
-              <a:noFill/>
-            </p:spPr>
-            <p:txBody>
-              <a:bodyPr wrap="none" rtlCol="0" anchor="t">
-                <a:spAutoFit/>
-              </a:bodyPr>
-              <a:lstStyle/>
-              <a:p>
-                <a:pPr algn="l"/>
-                <a14:m>
-                  <m:oMathPara xmlns:m="http://schemas.openxmlformats.org/officeDocument/2006/math">
-                    <m:oMathParaPr>
-                      <m:jc m:val="centerGroup"/>
-                    </m:oMathParaPr>
-                    <m:oMath xmlns:m="http://schemas.openxmlformats.org/officeDocument/2006/math">
-                      <m:sSub>
-                        <m:sSubPr>
-                          <m:ctrlPr>
-                            <a:rPr lang="en-US" altLang="zh-CN" sz="1515" i="1">
-                              <a:latin typeface="Cambria Math" panose="02040503050406030204" pitchFamily="18" charset="0"/>
-                              <a:cs typeface="Cambria Math" panose="02040503050406030204" charset="0"/>
-                            </a:rPr>
-                          </m:ctrlPr>
-                        </m:sSubPr>
-                        <m:e>
-                          <m:r>
-                            <a:rPr lang="en-US" altLang="zh-CN" sz="1515" i="1">
-                              <a:latin typeface="Cambria Math" panose="02040503050406030204" charset="0"/>
-                              <a:cs typeface="Cambria Math" panose="02040503050406030204" charset="0"/>
-                            </a:rPr>
-                            <m:t>𝛾</m:t>
-                          </m:r>
-                        </m:e>
-                        <m:sub>
-                          <m:r>
-                            <a:rPr lang="en-US" altLang="zh-CN" sz="1515" i="1">
-                              <a:latin typeface="Cambria Math" panose="02040503050406030204" charset="0"/>
-                              <a:cs typeface="Cambria Math" panose="02040503050406030204" charset="0"/>
-                            </a:rPr>
-                            <m:t>𝑧</m:t>
-                          </m:r>
-                        </m:sub>
-                      </m:sSub>
-                      <m:r>
-                        <a:rPr lang="en-US" altLang="zh-CN" sz="1515" i="1">
-                          <a:latin typeface="Cambria Math" panose="02040503050406030204" charset="0"/>
-                          <a:cs typeface="Cambria Math" panose="02040503050406030204" charset="0"/>
-                        </a:rPr>
-                        <m:t>=0.39%</m:t>
-                      </m:r>
-                    </m:oMath>
-                  </m:oMathPara>
-                </a14:m>
-                <a:endParaRPr lang="zh-CN" altLang="en-US" sz="1515"/>
-              </a:p>
-            </p:txBody>
-          </p:sp>
-        </mc:Choice>
-        <mc:Fallback xmlns="">
-          <p:sp>
-            <p:nvSpPr>
-              <p:cNvPr id="10" name="文本框 9"/>
-              <p:cNvSpPr txBox="1">
-                <a:spLocks noRot="1" noChangeAspect="1" noMove="1" noResize="1" noEditPoints="1" noAdjustHandles="1" noChangeArrowheads="1" noChangeShapeType="1" noTextEdit="1"/>
-              </p:cNvSpPr>
-              <p:nvPr/>
-            </p:nvSpPr>
-            <p:spPr>
-              <a:xfrm>
-                <a:off x="1767290" y="1215314"/>
-                <a:ext cx="1156970" cy="324485"/>
-              </a:xfrm>
-              <a:prstGeom prst="rect">
-                <a:avLst/>
-              </a:prstGeom>
-              <a:blipFill rotWithShape="1">
-                <a:blip r:embed="rId7"/>
-                <a:stretch>
-                  <a:fillRect l="-7" t="-172" r="7" b="172"/>
-                </a:stretch>
-              </a:blipFill>
-            </p:spPr>
-            <p:txBody>
-              <a:bodyPr/>
-              <a:lstStyle/>
-              <a:p>
-                <a:r>
-                  <a:rPr lang="zh-CN" altLang="en-US">
-                    <a:noFill/>
-                  </a:rPr>
-                  <a:t> </a:t>
-                </a:r>
-              </a:p>
-            </p:txBody>
-          </p:sp>
-        </mc:Fallback>
-      </mc:AlternateContent>
+      <p:graphicFrame>
+        <p:nvGraphicFramePr>
+          <p:cNvPr id="2" name="对象 1">
+            <a:extLst>
+              <a:ext uri="{FF2B5EF4-FFF2-40B4-BE49-F238E27FC236}">
+                <a16:creationId xmlns:a16="http://schemas.microsoft.com/office/drawing/2014/main" id="{A40B12DE-068E-F085-A250-A8C0FE51A154}"/>
+              </a:ext>
+            </a:extLst>
+          </p:cNvPr>
+          <p:cNvGraphicFramePr>
+            <a:graphicFrameLocks noChangeAspect="1"/>
+          </p:cNvGraphicFramePr>
+          <p:nvPr>
+            <p:extLst>
+              <p:ext uri="{D42A27DB-BD31-4B8C-83A1-F6EECF244321}">
+                <p14:modId xmlns:p14="http://schemas.microsoft.com/office/powerpoint/2010/main" val="3533532519"/>
+              </p:ext>
+            </p:extLst>
+          </p:nvPr>
+        </p:nvGraphicFramePr>
+        <p:xfrm>
+          <a:off x="5641975" y="3628787"/>
+          <a:ext cx="2304597" cy="357188"/>
+        </p:xfrm>
+        <a:graphic>
+          <a:graphicData uri="http://schemas.openxmlformats.org/presentationml/2006/ole">
+            <mc:AlternateContent xmlns:mc="http://schemas.openxmlformats.org/markup-compatibility/2006">
+              <mc:Choice xmlns:v="urn:schemas-microsoft-com:vml" Requires="v">
+                <p:oleObj name="AxMath" r:id="rId4" imgW="1495440" imgH="231840" progId="Equation.AxMath">
+                  <p:embed/>
+                </p:oleObj>
+              </mc:Choice>
+              <mc:Fallback>
+                <p:oleObj name="AxMath" r:id="rId4" imgW="1495440" imgH="231840" progId="Equation.AxMath">
+                  <p:embed/>
+                  <p:pic>
+                    <p:nvPicPr>
+                      <p:cNvPr id="0" name=""/>
+                      <p:cNvPicPr/>
+                      <p:nvPr/>
+                    </p:nvPicPr>
+                    <p:blipFill>
+                      <a:blip r:embed="rId5"/>
+                      <a:stretch>
+                        <a:fillRect/>
+                      </a:stretch>
+                    </p:blipFill>
+                    <p:spPr>
+                      <a:xfrm>
+                        <a:off x="5641975" y="3628787"/>
+                        <a:ext cx="2304597" cy="357188"/>
+                      </a:xfrm>
+                      <a:prstGeom prst="rect">
+                        <a:avLst/>
+                      </a:prstGeom>
+                    </p:spPr>
+                  </p:pic>
+                </p:oleObj>
+              </mc:Fallback>
+            </mc:AlternateContent>
+          </a:graphicData>
+        </a:graphic>
+      </p:graphicFrame>
+      <p:graphicFrame>
+        <p:nvGraphicFramePr>
+          <p:cNvPr id="3" name="对象 2">
+            <a:extLst>
+              <a:ext uri="{FF2B5EF4-FFF2-40B4-BE49-F238E27FC236}">
+                <a16:creationId xmlns:a16="http://schemas.microsoft.com/office/drawing/2014/main" id="{FEA8830E-5E61-D0CE-29E7-26B532339768}"/>
+              </a:ext>
+            </a:extLst>
+          </p:cNvPr>
+          <p:cNvGraphicFramePr>
+            <a:graphicFrameLocks noChangeAspect="1"/>
+          </p:cNvGraphicFramePr>
+          <p:nvPr>
+            <p:extLst>
+              <p:ext uri="{D42A27DB-BD31-4B8C-83A1-F6EECF244321}">
+                <p14:modId xmlns:p14="http://schemas.microsoft.com/office/powerpoint/2010/main" val="4013878597"/>
+              </p:ext>
+            </p:extLst>
+          </p:nvPr>
+        </p:nvGraphicFramePr>
+        <p:xfrm>
+          <a:off x="2540000" y="4453783"/>
+          <a:ext cx="2844800" cy="357188"/>
+        </p:xfrm>
+        <a:graphic>
+          <a:graphicData uri="http://schemas.openxmlformats.org/presentationml/2006/ole">
+            <mc:AlternateContent xmlns:mc="http://schemas.openxmlformats.org/markup-compatibility/2006">
+              <mc:Choice xmlns:v="urn:schemas-microsoft-com:vml" Requires="v">
+                <p:oleObj name="AxMath" r:id="rId6" imgW="1848600" imgH="232560" progId="Equation.AxMath">
+                  <p:embed/>
+                </p:oleObj>
+              </mc:Choice>
+              <mc:Fallback>
+                <p:oleObj name="AxMath" r:id="rId6" imgW="1848600" imgH="232560" progId="Equation.AxMath">
+                  <p:embed/>
+                  <p:pic>
+                    <p:nvPicPr>
+                      <p:cNvPr id="0" name=""/>
+                      <p:cNvPicPr/>
+                      <p:nvPr/>
+                    </p:nvPicPr>
+                    <p:blipFill>
+                      <a:blip r:embed="rId7"/>
+                      <a:stretch>
+                        <a:fillRect/>
+                      </a:stretch>
+                    </p:blipFill>
+                    <p:spPr>
+                      <a:xfrm>
+                        <a:off x="2540000" y="4453783"/>
+                        <a:ext cx="2844800" cy="357188"/>
+                      </a:xfrm>
+                      <a:prstGeom prst="rect">
+                        <a:avLst/>
+                      </a:prstGeom>
+                    </p:spPr>
+                  </p:pic>
+                </p:oleObj>
+              </mc:Fallback>
+            </mc:AlternateContent>
+          </a:graphicData>
+        </a:graphic>
+      </p:graphicFrame>
+      <p:graphicFrame>
+        <p:nvGraphicFramePr>
+          <p:cNvPr id="14" name="对象 13">
+            <a:extLst>
+              <a:ext uri="{FF2B5EF4-FFF2-40B4-BE49-F238E27FC236}">
+                <a16:creationId xmlns:a16="http://schemas.microsoft.com/office/drawing/2014/main" id="{939C5879-6364-C59A-8269-E7EE3F5D3EE7}"/>
+              </a:ext>
+            </a:extLst>
+          </p:cNvPr>
+          <p:cNvGraphicFramePr>
+            <a:graphicFrameLocks noChangeAspect="1"/>
+          </p:cNvGraphicFramePr>
+          <p:nvPr>
+            <p:extLst>
+              <p:ext uri="{D42A27DB-BD31-4B8C-83A1-F6EECF244321}">
+                <p14:modId xmlns:p14="http://schemas.microsoft.com/office/powerpoint/2010/main" val="3148364616"/>
+              </p:ext>
+            </p:extLst>
+          </p:nvPr>
+        </p:nvGraphicFramePr>
+        <p:xfrm>
+          <a:off x="4013253" y="1902406"/>
+          <a:ext cx="3157747" cy="324485"/>
+        </p:xfrm>
+        <a:graphic>
+          <a:graphicData uri="http://schemas.openxmlformats.org/presentationml/2006/ole">
+            <mc:AlternateContent xmlns:mc="http://schemas.openxmlformats.org/markup-compatibility/2006">
+              <mc:Choice xmlns:v="urn:schemas-microsoft-com:vml" Requires="v">
+                <p:oleObj name="AxMath" r:id="rId8" imgW="2302200" imgH="237240" progId="Equation.AxMath">
+                  <p:embed/>
+                </p:oleObj>
+              </mc:Choice>
+              <mc:Fallback>
+                <p:oleObj name="AxMath" r:id="rId8" imgW="2302200" imgH="237240" progId="Equation.AxMath">
+                  <p:embed/>
+                  <p:pic>
+                    <p:nvPicPr>
+                      <p:cNvPr id="0" name=""/>
+                      <p:cNvPicPr/>
+                      <p:nvPr/>
+                    </p:nvPicPr>
+                    <p:blipFill>
+                      <a:blip r:embed="rId9"/>
+                      <a:stretch>
+                        <a:fillRect/>
+                      </a:stretch>
+                    </p:blipFill>
+                    <p:spPr>
+                      <a:xfrm>
+                        <a:off x="4013253" y="1902406"/>
+                        <a:ext cx="3157747" cy="324485"/>
+                      </a:xfrm>
+                      <a:prstGeom prst="rect">
+                        <a:avLst/>
+                      </a:prstGeom>
+                    </p:spPr>
+                  </p:pic>
+                </p:oleObj>
+              </mc:Fallback>
+            </mc:AlternateContent>
+          </a:graphicData>
+        </a:graphic>
+      </p:graphicFrame>
+      <p:graphicFrame>
+        <p:nvGraphicFramePr>
+          <p:cNvPr id="15" name="对象 14">
+            <a:extLst>
+              <a:ext uri="{FF2B5EF4-FFF2-40B4-BE49-F238E27FC236}">
+                <a16:creationId xmlns:a16="http://schemas.microsoft.com/office/drawing/2014/main" id="{11147F8F-64E7-F352-7F46-7B6BD4A2D93C}"/>
+              </a:ext>
+            </a:extLst>
+          </p:cNvPr>
+          <p:cNvGraphicFramePr>
+            <a:graphicFrameLocks noChangeAspect="1"/>
+          </p:cNvGraphicFramePr>
+          <p:nvPr>
+            <p:extLst>
+              <p:ext uri="{D42A27DB-BD31-4B8C-83A1-F6EECF244321}">
+                <p14:modId xmlns:p14="http://schemas.microsoft.com/office/powerpoint/2010/main" val="4198895377"/>
+              </p:ext>
+            </p:extLst>
+          </p:nvPr>
+        </p:nvGraphicFramePr>
+        <p:xfrm>
+          <a:off x="1361758" y="1146969"/>
+          <a:ext cx="1236416" cy="357188"/>
+        </p:xfrm>
+        <a:graphic>
+          <a:graphicData uri="http://schemas.openxmlformats.org/presentationml/2006/ole">
+            <mc:AlternateContent xmlns:mc="http://schemas.openxmlformats.org/markup-compatibility/2006">
+              <mc:Choice xmlns:v="urn:schemas-microsoft-com:vml" Requires="v">
+                <p:oleObj name="AxMath" r:id="rId10" imgW="786600" imgH="227520" progId="Equation.AxMath">
+                  <p:embed/>
+                </p:oleObj>
+              </mc:Choice>
+              <mc:Fallback>
+                <p:oleObj name="AxMath" r:id="rId10" imgW="786600" imgH="227520" progId="Equation.AxMath">
+                  <p:embed/>
+                  <p:pic>
+                    <p:nvPicPr>
+                      <p:cNvPr id="0" name=""/>
+                      <p:cNvPicPr/>
+                      <p:nvPr/>
+                    </p:nvPicPr>
+                    <p:blipFill>
+                      <a:blip r:embed="rId11"/>
+                      <a:stretch>
+                        <a:fillRect/>
+                      </a:stretch>
+                    </p:blipFill>
+                    <p:spPr>
+                      <a:xfrm>
+                        <a:off x="1361758" y="1146969"/>
+                        <a:ext cx="1236416" cy="357188"/>
+                      </a:xfrm>
+                      <a:prstGeom prst="rect">
+                        <a:avLst/>
+                      </a:prstGeom>
+                    </p:spPr>
+                  </p:pic>
+                </p:oleObj>
+              </mc:Fallback>
+            </mc:AlternateContent>
+          </a:graphicData>
+        </a:graphic>
+      </p:graphicFrame>
     </p:spTree>
     <p:custDataLst>
       <p:tags r:id="rId1"/>
@@ -4484,13 +3739,13 @@
           <p:nvPr>
             <p:extLst>
               <p:ext uri="{D42A27DB-BD31-4B8C-83A1-F6EECF244321}">
-                <p14:modId xmlns:p14="http://schemas.microsoft.com/office/powerpoint/2010/main" val="1703447510"/>
+                <p14:modId xmlns:p14="http://schemas.microsoft.com/office/powerpoint/2010/main" val="4210771399"/>
               </p:ext>
             </p:extLst>
           </p:nvPr>
         </p:nvGraphicFramePr>
         <p:xfrm>
-          <a:off x="3309590" y="3423054"/>
+          <a:off x="3875976" y="3712227"/>
           <a:ext cx="513011" cy="267740"/>
         </p:xfrm>
         <a:graphic>
@@ -4518,7 +3773,7 @@
                     </p:blipFill>
                     <p:spPr>
                       <a:xfrm>
-                        <a:off x="3309590" y="3423054"/>
+                        <a:off x="3875976" y="3712227"/>
                         <a:ext cx="513011" cy="267740"/>
                       </a:xfrm>
                       <a:prstGeom prst="rect">
